--- a/assets/pptx/catalog-764.pptx
+++ b/assets/pptx/catalog-764.pptx
@@ -3596,7 +3596,7 @@
                 <a:ea typeface="Ebrima"/>
                 <a:cs typeface="Ebrima"/>
               </a:rPr>
-              <a:t>ለርሱ እቀኛለሁ አዜማለሁ (2x)</a:t>
+              <a:t>ለርሱ እቀኛለሁ አዜማለሁ 2x</a:t>
             </a:r>
           </a:p>
         </p:txBody>
@@ -4132,7 +4132,7 @@
                 <a:ea typeface="Ebrima"/>
                 <a:cs typeface="Ebrima"/>
               </a:rPr>
-              <a:t>ለርሱ እቀኛለሁ አዜማለሁ (3x)</a:t>
+              <a:t>ለርሱ እቀኛለሁ አዜማለሁ 3x</a:t>
             </a:r>
           </a:p>
         </p:txBody>
@@ -4534,7 +4534,7 @@
                 <a:ea typeface="Ebrima"/>
                 <a:cs typeface="Ebrima"/>
               </a:rPr>
-              <a:t>ለርሱ እቀኛለሁ አዜማለሁ (2x)</a:t>
+              <a:t>ለርሱ እቀኛለሁ አዜማለሁ 2x</a:t>
             </a:r>
           </a:p>
         </p:txBody>
